--- a/courses/learn_yosys/module05-03-offline-benchmark-compare/slides.pptx
+++ b/courses/learn_yosys/module05-03-offline-benchmark-compare/slides.pptx
@@ -11,6 +11,9 @@
     <p:sldId id="259" r:id="rId11"/>
     <p:sldId id="260" r:id="rId12"/>
     <p:sldId id="261" r:id="rId13"/>
+    <p:sldId id="262" r:id="rId14"/>
+    <p:sldId id="263" r:id="rId15"/>
+    <p:sldId id="264" r:id="rId16"/>
   </p:sldIdLst>
   <p:sldSz cx="12191695" cy="6858000" type="screen4x3"/>
   <p:notesSz cx="6858000" cy="9144000"/>
@@ -507,7 +510,7 @@
           <a:lstStyle/>
           <a:p>
             <a:r>
-              <a:t>Track A prints yosys_compare without the browser.</a:t>
+              <a:t>Print pass-map and real Yosys compare metrics without the browser.</a:t>
             </a:r>
           </a:p>
         </p:txBody>
@@ -577,7 +580,7 @@
           <a:lstStyle/>
           <a:p>
             <a:r>
-              <a:t>Load tiny_yosys.json; print rtl_cells, after_opt, nand_area, report_cells, ok.</a:t>
+              <a:t>Run the pass-map compare helper from the common folder.</a:t>
             </a:r>
           </a:p>
         </p:txBody>
@@ -647,7 +650,7 @@
           <a:lstStyle/>
           <a:p>
             <a:r>
-              <a:t>Print yosys_compare metrics offline without the browser.</a:t>
+              <a:t>Run the real evidence compare helper.</a:t>
             </a:r>
           </a:p>
         </p:txBody>
@@ -717,7 +720,7 @@
           <a:lstStyle/>
           <a:p>
             <a:r>
-              <a:t>python3 -c "from solvers import yosys_compare; print(yosys_compare())" in common/</a:t>
+              <a:t>Open offline-benchmark-compare if you prefer the browser view of the same metrics.</a:t>
             </a:r>
           </a:p>
         </p:txBody>
@@ -787,7 +790,7 @@
           <a:lstStyle/>
           <a:p>
             <a:r>
-              <a:t>Load tiny_yosys.json; print rtl_cells, after_opt, nand_area, report_cells, ok.</a:t>
+              <a:t>Confirm both compare helpers print ok goldens from the common folder.</a:t>
             </a:r>
           </a:p>
         </p:txBody>
@@ -857,7 +860,77 @@
           <a:lstStyle/>
           <a:p>
             <a:r>
-              <a:t>Continue to the wrap module.</a:t>
+              <a:t>Comparing only one track. Ignoring checked-in goldens when Yosys is missing.</a:t>
+            </a:r>
+          </a:p>
+        </p:txBody>
+      </p:sp>
+      <p:sp>
+        <p:nvSpPr>
+          <p:cNvPr id="4" name="Slide Number Placeholder 3"/>
+          <p:cNvSpPr>
+            <a:spLocks noGrp="1"/>
+          </p:cNvSpPr>
+          <p:nvPr>
+            <p:ph type="sldNum" idx="5" sz="quarter"/>
+          </p:nvPr>
+        </p:nvSpPr>
+        <p:spPr/>
+      </p:sp>
+    </p:spTree>
+  </p:cSld>
+  <p:clrMapOvr>
+    <a:masterClrMapping/>
+  </p:clrMapOvr>
+</p:notes>
+</file>
+
+<file path=ppt/notesSlides/notesSlide7.xml><?xml version="1.0" encoding="utf-8"?>
+<p:notes xmlns:a="http://schemas.openxmlformats.org/drawingml/2006/main" xmlns:p="http://schemas.openxmlformats.org/presentationml/2006/main" xmlns:r="http://schemas.openxmlformats.org/officeDocument/2006/relationships">
+  <p:cSld>
+    <p:spTree>
+      <p:nvGrpSpPr>
+        <p:cNvPr id="1" name=""/>
+        <p:cNvGrpSpPr/>
+        <p:nvPr/>
+      </p:nvGrpSpPr>
+      <p:grpSpPr>
+        <a:xfrm>
+          <a:off x="0" y="0"/>
+          <a:ext cx="0" cy="0"/>
+          <a:chOff x="0" y="0"/>
+          <a:chExt cx="0" cy="0"/>
+        </a:xfrm>
+      </p:grpSpPr>
+      <p:sp>
+        <p:nvSpPr>
+          <p:cNvPr id="2" name="Slide Image Placeholder 1"/>
+          <p:cNvSpPr>
+            <a:spLocks noGrp="1"/>
+          </p:cNvSpPr>
+          <p:nvPr>
+            <p:ph type="sldImg" idx="2"/>
+          </p:nvPr>
+        </p:nvSpPr>
+        <p:spPr/>
+      </p:sp>
+      <p:sp>
+        <p:nvSpPr>
+          <p:cNvPr id="3" name="Notes Placeholder 2"/>
+          <p:cNvSpPr>
+            <a:spLocks noGrp="1"/>
+          </p:cNvSpPr>
+          <p:nvPr>
+            <p:ph type="body" idx="3" sz="quarter"/>
+          </p:nvPr>
+        </p:nvSpPr>
+        <p:spPr/>
+        <p:txBody>
+          <a:bodyPr/>
+          <a:lstStyle/>
+          <a:p>
+            <a:r>
+              <a:t>Continue into the real CLI modules, then Part C algorithms.</a:t>
             </a:r>
           </a:p>
         </p:txBody>
@@ -3900,7 +3973,7 @@
                 </a:solidFill>
                 <a:latin typeface="Calibri"/>
               </a:rPr>
-              <a:t>Offline compare</a:t>
+              <a:t>Why offline compare</a:t>
             </a:r>
           </a:p>
           <a:p>
@@ -3919,7 +3992,7 @@
                 </a:solidFill>
                 <a:latin typeface="Calibri"/>
               </a:rPr>
-              <a:t>Track A prints yosys_compare without the browser</a:t>
+              <a:t>Print pass-map and real Yosys compare metrics without the browser</a:t>
             </a:r>
           </a:p>
         </p:txBody>
@@ -4015,7 +4088,7 @@
                 </a:solidFill>
                 <a:latin typeface="Calibri"/>
               </a:rPr>
-              <a:t>The idea</a:t>
+              <a:t>Pass-map compare</a:t>
             </a:r>
           </a:p>
         </p:txBody>
@@ -4060,7 +4133,7 @@
                 </a:solidFill>
                 <a:latin typeface="Calibri"/>
               </a:rPr>
-              <a:t>Load tiny_yosys.json; print rtl_cells, after_opt, nand_area, report_cells, ok</a:t>
+              <a:t>Run the pass-map compare helper from the common folder</a:t>
             </a:r>
           </a:p>
         </p:txBody>
@@ -4156,7 +4229,7 @@
                 </a:solidFill>
                 <a:latin typeface="Calibri"/>
               </a:rPr>
-              <a:t>Why offline</a:t>
+              <a:t>Pass-map compare — try these</a:t>
             </a:r>
           </a:p>
         </p:txBody>
@@ -4169,13 +4242,15 @@
         </p:nvSpPr>
         <p:spPr>
           <a:xfrm>
-            <a:off x="548640" y="1234440"/>
-            <a:ext cx="11064240" cy="4937760"/>
+            <a:off x="548640" y="1143000"/>
+            <a:ext cx="11064240" cy="5029200"/>
           </a:xfrm>
           <a:prstGeom prst="rect">
             <a:avLst/>
           </a:prstGeom>
-          <a:noFill/>
+          <a:solidFill>
+            <a:srgbClr val="F4F4F4"/>
+          </a:solidFill>
         </p:spPr>
         <p:txBody>
           <a:bodyPr wrap="square">
@@ -4183,25 +4258,60 @@
           </a:bodyPr>
           <a:lstStyle/>
           <a:p>
-            <a:pPr lvl="0" marL="457200" indent="-228600">
-              <a:buFont typeface="Calibri"/>
-              <a:spcAft>
-                <a:spcPts val="1000"/>
-              </a:spcAft>
-              <a:buSzPct val="100000"/>
-              <a:buChar char="•"/>
+            <a:pPr>
               <a:lnSpc>
                 <a:spcPts val="2200"/>
               </a:lnSpc>
+              <a:spcAft>
+                <a:spcPts val="400"/>
+              </a:spcAft>
             </a:pPr>
             <a:r>
               <a:rPr sz="2000" b="0">
                 <a:solidFill>
                   <a:srgbClr val="333333"/>
                 </a:solidFill>
-                <a:latin typeface="Calibri"/>
+                <a:latin typeface="Consolas"/>
               </a:rPr>
-              <a:t>Print yosys_compare metrics offline without the browser</a:t>
+              <a:t>cd courses/learn_yosys/common</a:t>
+            </a:r>
+          </a:p>
+          <a:p>
+            <a:pPr>
+              <a:lnSpc>
+                <a:spcPts val="2200"/>
+              </a:lnSpc>
+              <a:spcAft>
+                <a:spcPts val="400"/>
+              </a:spcAft>
+            </a:pPr>
+            <a:r>
+              <a:rPr sz="2000" b="0">
+                <a:solidFill>
+                  <a:srgbClr val="333333"/>
+                </a:solidFill>
+                <a:latin typeface="Consolas"/>
+              </a:rPr>
+              <a:t>python3 -c "from solvers import yosys_compare;</a:t>
+            </a:r>
+          </a:p>
+          <a:p>
+            <a:pPr>
+              <a:lnSpc>
+                <a:spcPts val="2200"/>
+              </a:lnSpc>
+              <a:spcAft>
+                <a:spcPts val="400"/>
+              </a:spcAft>
+            </a:pPr>
+            <a:r>
+              <a:rPr sz="2000" b="0">
+                <a:solidFill>
+                  <a:srgbClr val="333333"/>
+                </a:solidFill>
+                <a:latin typeface="Consolas"/>
+              </a:rPr>
+              <a:t>print(yosys_compare())"</a:t>
             </a:r>
           </a:p>
         </p:txBody>
@@ -4297,7 +4407,7 @@
                 </a:solidFill>
                 <a:latin typeface="Calibri"/>
               </a:rPr>
-              <a:t>Commands</a:t>
+              <a:t>Real compare</a:t>
             </a:r>
           </a:p>
         </p:txBody>
@@ -4342,7 +4452,7 @@
                 </a:solidFill>
                 <a:latin typeface="Calibri"/>
               </a:rPr>
-              <a:t>Python3 -c "from solvers import yosys_compare; print(yosys_compare())" in common/</a:t>
+              <a:t>Run the real evidence compare helper</a:t>
             </a:r>
           </a:p>
         </p:txBody>
@@ -4438,7 +4548,7 @@
                 </a:solidFill>
                 <a:latin typeface="Calibri"/>
               </a:rPr>
-              <a:t>What to compare</a:t>
+              <a:t>Real compare — try these</a:t>
             </a:r>
           </a:p>
         </p:txBody>
@@ -4451,13 +4561,15 @@
         </p:nvSpPr>
         <p:spPr>
           <a:xfrm>
-            <a:off x="548640" y="1234440"/>
-            <a:ext cx="11064240" cy="4937760"/>
+            <a:off x="548640" y="1143000"/>
+            <a:ext cx="11064240" cy="5029200"/>
           </a:xfrm>
           <a:prstGeom prst="rect">
             <a:avLst/>
           </a:prstGeom>
-          <a:noFill/>
+          <a:solidFill>
+            <a:srgbClr val="F4F4F4"/>
+          </a:solidFill>
         </p:spPr>
         <p:txBody>
           <a:bodyPr wrap="square">
@@ -4465,25 +4577,60 @@
           </a:bodyPr>
           <a:lstStyle/>
           <a:p>
-            <a:pPr lvl="0" marL="457200" indent="-228600">
-              <a:buFont typeface="Calibri"/>
-              <a:spcAft>
-                <a:spcPts val="1000"/>
-              </a:spcAft>
-              <a:buSzPct val="100000"/>
-              <a:buChar char="•"/>
+            <a:pPr>
               <a:lnSpc>
                 <a:spcPts val="2200"/>
               </a:lnSpc>
+              <a:spcAft>
+                <a:spcPts val="400"/>
+              </a:spcAft>
             </a:pPr>
             <a:r>
               <a:rPr sz="2000" b="0">
                 <a:solidFill>
                   <a:srgbClr val="333333"/>
                 </a:solidFill>
-                <a:latin typeface="Calibri"/>
+                <a:latin typeface="Consolas"/>
               </a:rPr>
-              <a:t>Load tiny_yosys.json; print rtl_cells, after_opt, nand_area, report_cells, ok</a:t>
+              <a:t>cd courses/learn_yosys/common</a:t>
+            </a:r>
+          </a:p>
+          <a:p>
+            <a:pPr>
+              <a:lnSpc>
+                <a:spcPts val="2200"/>
+              </a:lnSpc>
+              <a:spcAft>
+                <a:spcPts val="400"/>
+              </a:spcAft>
+            </a:pPr>
+            <a:r>
+              <a:rPr sz="2000" b="0">
+                <a:solidFill>
+                  <a:srgbClr val="333333"/>
+                </a:solidFill>
+                <a:latin typeface="Consolas"/>
+              </a:rPr>
+              <a:t>python3 -c "from real_solvers import real_yosys_compare;</a:t>
+            </a:r>
+          </a:p>
+          <a:p>
+            <a:pPr>
+              <a:lnSpc>
+                <a:spcPts val="2200"/>
+              </a:lnSpc>
+              <a:spcAft>
+                <a:spcPts val="400"/>
+              </a:spcAft>
+            </a:pPr>
+            <a:r>
+              <a:rPr sz="2000" b="0">
+                <a:solidFill>
+                  <a:srgbClr val="333333"/>
+                </a:solidFill>
+                <a:latin typeface="Consolas"/>
+              </a:rPr>
+              <a:t>print(real_yosys_compare())"</a:t>
             </a:r>
           </a:p>
         </p:txBody>
@@ -4579,7 +4726,7 @@
                 </a:solidFill>
                 <a:latin typeface="Calibri"/>
               </a:rPr>
-              <a:t>Next</a:t>
+              <a:t>Browser lab track</a:t>
             </a:r>
           </a:p>
         </p:txBody>
@@ -4624,9 +4771,128 @@
                 </a:solidFill>
                 <a:latin typeface="Calibri"/>
               </a:rPr>
-              <a:t>Complete the quiz for this part</a:t>
-            </a:r>
-          </a:p>
+              <a:t>Open offline-benchmark-compare if you prefer the browser view of the same metrics</a:t>
+            </a:r>
+          </a:p>
+        </p:txBody>
+      </p:sp>
+      <p:sp>
+        <p:nvSpPr>
+          <p:cNvPr id="4" name="TextBox 3"/>
+          <p:cNvSpPr txBox="1"/>
+          <p:nvPr/>
+        </p:nvSpPr>
+        <p:spPr>
+          <a:xfrm>
+            <a:off x="548640" y="6355080"/>
+            <a:ext cx="11064240" cy="320040"/>
+          </a:xfrm>
+          <a:prstGeom prst="rect">
+            <a:avLst/>
+          </a:prstGeom>
+          <a:noFill/>
+        </p:spPr>
+        <p:txBody>
+          <a:bodyPr wrap="square">
+            <a:noAutofit/>
+          </a:bodyPr>
+          <a:lstStyle/>
+          <a:p>
+            <a:pPr algn="r">
+              <a:lnSpc>
+                <a:spcPts val="2200"/>
+              </a:lnSpc>
+              <a:defRPr sz="1000" b="0">
+                <a:solidFill>
+                  <a:srgbClr val="666666"/>
+                </a:solidFill>
+                <a:latin typeface="Calibri"/>
+              </a:defRPr>
+            </a:pPr>
+            <a:r>
+              <a:t>learn_yosys — 03 offline benchmark compare</a:t>
+            </a:r>
+          </a:p>
+        </p:txBody>
+      </p:sp>
+    </p:spTree>
+  </p:cSld>
+  <p:clrMapOvr>
+    <a:masterClrMapping/>
+  </p:clrMapOvr>
+</p:sld>
+</file>
+
+<file path=ppt/slides/slide7.xml><?xml version="1.0" encoding="utf-8"?>
+<p:sld xmlns:a="http://schemas.openxmlformats.org/drawingml/2006/main" xmlns:p="http://schemas.openxmlformats.org/presentationml/2006/main" xmlns:r="http://schemas.openxmlformats.org/officeDocument/2006/relationships">
+  <p:cSld>
+    <p:spTree>
+      <p:nvGrpSpPr>
+        <p:cNvPr id="1" name=""/>
+        <p:cNvGrpSpPr/>
+        <p:nvPr/>
+      </p:nvGrpSpPr>
+      <p:grpSpPr/>
+      <p:sp>
+        <p:nvSpPr>
+          <p:cNvPr id="2" name="TextBox 1"/>
+          <p:cNvSpPr txBox="1"/>
+          <p:nvPr/>
+        </p:nvSpPr>
+        <p:spPr>
+          <a:xfrm>
+            <a:off x="548640" y="411480"/>
+            <a:ext cx="11064240" cy="777240"/>
+          </a:xfrm>
+          <a:prstGeom prst="rect">
+            <a:avLst/>
+          </a:prstGeom>
+          <a:noFill/>
+        </p:spPr>
+        <p:txBody>
+          <a:bodyPr wrap="square">
+            <a:noAutofit/>
+          </a:bodyPr>
+          <a:lstStyle/>
+          <a:p>
+            <a:pPr>
+              <a:lnSpc>
+                <a:spcPts val="2200"/>
+              </a:lnSpc>
+            </a:pPr>
+            <a:r>
+              <a:rPr sz="2800" b="1">
+                <a:solidFill>
+                  <a:srgbClr val="1A1A2E"/>
+                </a:solidFill>
+                <a:latin typeface="Calibri"/>
+              </a:rPr>
+              <a:t>Implement track</a:t>
+            </a:r>
+          </a:p>
+        </p:txBody>
+      </p:sp>
+      <p:sp>
+        <p:nvSpPr>
+          <p:cNvPr id="3" name="TextBox 2"/>
+          <p:cNvSpPr txBox="1"/>
+          <p:nvPr/>
+        </p:nvSpPr>
+        <p:spPr>
+          <a:xfrm>
+            <a:off x="548640" y="1234440"/>
+            <a:ext cx="11064240" cy="4937760"/>
+          </a:xfrm>
+          <a:prstGeom prst="rect">
+            <a:avLst/>
+          </a:prstGeom>
+          <a:noFill/>
+        </p:spPr>
+        <p:txBody>
+          <a:bodyPr wrap="square">
+            <a:noAutofit/>
+          </a:bodyPr>
+          <a:lstStyle/>
           <a:p>
             <a:pPr lvl="0" marL="457200" indent="-228600">
               <a:buFont typeface="Calibri"/>
@@ -4646,7 +4912,333 @@
                 </a:solidFill>
                 <a:latin typeface="Calibri"/>
               </a:rPr>
-              <a:t>Continue to the wrap module</a:t>
+              <a:t>Confirm both compare helpers print ok goldens from the common folder</a:t>
+            </a:r>
+          </a:p>
+        </p:txBody>
+      </p:sp>
+      <p:sp>
+        <p:nvSpPr>
+          <p:cNvPr id="4" name="TextBox 3"/>
+          <p:cNvSpPr txBox="1"/>
+          <p:nvPr/>
+        </p:nvSpPr>
+        <p:spPr>
+          <a:xfrm>
+            <a:off x="548640" y="6355080"/>
+            <a:ext cx="11064240" cy="320040"/>
+          </a:xfrm>
+          <a:prstGeom prst="rect">
+            <a:avLst/>
+          </a:prstGeom>
+          <a:noFill/>
+        </p:spPr>
+        <p:txBody>
+          <a:bodyPr wrap="square">
+            <a:noAutofit/>
+          </a:bodyPr>
+          <a:lstStyle/>
+          <a:p>
+            <a:pPr algn="r">
+              <a:lnSpc>
+                <a:spcPts val="2200"/>
+              </a:lnSpc>
+              <a:defRPr sz="1000" b="0">
+                <a:solidFill>
+                  <a:srgbClr val="666666"/>
+                </a:solidFill>
+                <a:latin typeface="Calibri"/>
+              </a:defRPr>
+            </a:pPr>
+            <a:r>
+              <a:t>learn_yosys — 03 offline benchmark compare</a:t>
+            </a:r>
+          </a:p>
+        </p:txBody>
+      </p:sp>
+    </p:spTree>
+  </p:cSld>
+  <p:clrMapOvr>
+    <a:masterClrMapping/>
+  </p:clrMapOvr>
+</p:sld>
+</file>
+
+<file path=ppt/slides/slide8.xml><?xml version="1.0" encoding="utf-8"?>
+<p:sld xmlns:a="http://schemas.openxmlformats.org/drawingml/2006/main" xmlns:p="http://schemas.openxmlformats.org/presentationml/2006/main" xmlns:r="http://schemas.openxmlformats.org/officeDocument/2006/relationships">
+  <p:cSld>
+    <p:spTree>
+      <p:nvGrpSpPr>
+        <p:cNvPr id="1" name=""/>
+        <p:cNvGrpSpPr/>
+        <p:nvPr/>
+      </p:nvGrpSpPr>
+      <p:grpSpPr/>
+      <p:sp>
+        <p:nvSpPr>
+          <p:cNvPr id="2" name="TextBox 1"/>
+          <p:cNvSpPr txBox="1"/>
+          <p:nvPr/>
+        </p:nvSpPr>
+        <p:spPr>
+          <a:xfrm>
+            <a:off x="548640" y="411480"/>
+            <a:ext cx="11064240" cy="777240"/>
+          </a:xfrm>
+          <a:prstGeom prst="rect">
+            <a:avLst/>
+          </a:prstGeom>
+          <a:noFill/>
+        </p:spPr>
+        <p:txBody>
+          <a:bodyPr wrap="square">
+            <a:noAutofit/>
+          </a:bodyPr>
+          <a:lstStyle/>
+          <a:p>
+            <a:pPr>
+              <a:lnSpc>
+                <a:spcPts val="2200"/>
+              </a:lnSpc>
+            </a:pPr>
+            <a:r>
+              <a:rPr sz="2800" b="1">
+                <a:solidFill>
+                  <a:srgbClr val="1A1A2E"/>
+                </a:solidFill>
+                <a:latin typeface="Calibri"/>
+              </a:rPr>
+              <a:t>Pitfalls</a:t>
+            </a:r>
+          </a:p>
+        </p:txBody>
+      </p:sp>
+      <p:sp>
+        <p:nvSpPr>
+          <p:cNvPr id="3" name="TextBox 2"/>
+          <p:cNvSpPr txBox="1"/>
+          <p:nvPr/>
+        </p:nvSpPr>
+        <p:spPr>
+          <a:xfrm>
+            <a:off x="548640" y="1234440"/>
+            <a:ext cx="11064240" cy="4937760"/>
+          </a:xfrm>
+          <a:prstGeom prst="rect">
+            <a:avLst/>
+          </a:prstGeom>
+          <a:noFill/>
+        </p:spPr>
+        <p:txBody>
+          <a:bodyPr wrap="square">
+            <a:noAutofit/>
+          </a:bodyPr>
+          <a:lstStyle/>
+          <a:p>
+            <a:pPr lvl="0" marL="457200" indent="-228600">
+              <a:buFont typeface="Calibri"/>
+              <a:spcAft>
+                <a:spcPts val="1000"/>
+              </a:spcAft>
+              <a:buSzPct val="100000"/>
+              <a:buChar char="•"/>
+              <a:lnSpc>
+                <a:spcPts val="2200"/>
+              </a:lnSpc>
+            </a:pPr>
+            <a:r>
+              <a:rPr sz="2000" b="0">
+                <a:solidFill>
+                  <a:srgbClr val="333333"/>
+                </a:solidFill>
+                <a:latin typeface="Calibri"/>
+              </a:rPr>
+              <a:t>Comparing only one track</a:t>
+            </a:r>
+          </a:p>
+          <a:p>
+            <a:pPr lvl="0" marL="457200" indent="-228600">
+              <a:buFont typeface="Calibri"/>
+              <a:spcAft>
+                <a:spcPts val="1000"/>
+              </a:spcAft>
+              <a:buSzPct val="100000"/>
+              <a:buChar char="•"/>
+              <a:lnSpc>
+                <a:spcPts val="2200"/>
+              </a:lnSpc>
+            </a:pPr>
+            <a:r>
+              <a:rPr sz="2000" b="0">
+                <a:solidFill>
+                  <a:srgbClr val="333333"/>
+                </a:solidFill>
+                <a:latin typeface="Calibri"/>
+              </a:rPr>
+              <a:t>Ignoring checked-in goldens when Yosys is missing</a:t>
+            </a:r>
+          </a:p>
+        </p:txBody>
+      </p:sp>
+      <p:sp>
+        <p:nvSpPr>
+          <p:cNvPr id="4" name="TextBox 3"/>
+          <p:cNvSpPr txBox="1"/>
+          <p:nvPr/>
+        </p:nvSpPr>
+        <p:spPr>
+          <a:xfrm>
+            <a:off x="548640" y="6355080"/>
+            <a:ext cx="11064240" cy="320040"/>
+          </a:xfrm>
+          <a:prstGeom prst="rect">
+            <a:avLst/>
+          </a:prstGeom>
+          <a:noFill/>
+        </p:spPr>
+        <p:txBody>
+          <a:bodyPr wrap="square">
+            <a:noAutofit/>
+          </a:bodyPr>
+          <a:lstStyle/>
+          <a:p>
+            <a:pPr algn="r">
+              <a:lnSpc>
+                <a:spcPts val="2200"/>
+              </a:lnSpc>
+              <a:defRPr sz="1000" b="0">
+                <a:solidFill>
+                  <a:srgbClr val="666666"/>
+                </a:solidFill>
+                <a:latin typeface="Calibri"/>
+              </a:defRPr>
+            </a:pPr>
+            <a:r>
+              <a:t>learn_yosys — 03 offline benchmark compare</a:t>
+            </a:r>
+          </a:p>
+        </p:txBody>
+      </p:sp>
+    </p:spTree>
+  </p:cSld>
+  <p:clrMapOvr>
+    <a:masterClrMapping/>
+  </p:clrMapOvr>
+</p:sld>
+</file>
+
+<file path=ppt/slides/slide9.xml><?xml version="1.0" encoding="utf-8"?>
+<p:sld xmlns:a="http://schemas.openxmlformats.org/drawingml/2006/main" xmlns:p="http://schemas.openxmlformats.org/presentationml/2006/main" xmlns:r="http://schemas.openxmlformats.org/officeDocument/2006/relationships">
+  <p:cSld>
+    <p:spTree>
+      <p:nvGrpSpPr>
+        <p:cNvPr id="1" name=""/>
+        <p:cNvGrpSpPr/>
+        <p:nvPr/>
+      </p:nvGrpSpPr>
+      <p:grpSpPr/>
+      <p:sp>
+        <p:nvSpPr>
+          <p:cNvPr id="2" name="TextBox 1"/>
+          <p:cNvSpPr txBox="1"/>
+          <p:nvPr/>
+        </p:nvSpPr>
+        <p:spPr>
+          <a:xfrm>
+            <a:off x="548640" y="411480"/>
+            <a:ext cx="11064240" cy="777240"/>
+          </a:xfrm>
+          <a:prstGeom prst="rect">
+            <a:avLst/>
+          </a:prstGeom>
+          <a:noFill/>
+        </p:spPr>
+        <p:txBody>
+          <a:bodyPr wrap="square">
+            <a:noAutofit/>
+          </a:bodyPr>
+          <a:lstStyle/>
+          <a:p>
+            <a:pPr>
+              <a:lnSpc>
+                <a:spcPts val="2200"/>
+              </a:lnSpc>
+            </a:pPr>
+            <a:r>
+              <a:rPr sz="2800" b="1">
+                <a:solidFill>
+                  <a:srgbClr val="1A1A2E"/>
+                </a:solidFill>
+                <a:latin typeface="Calibri"/>
+              </a:rPr>
+              <a:t>Next</a:t>
+            </a:r>
+          </a:p>
+        </p:txBody>
+      </p:sp>
+      <p:sp>
+        <p:nvSpPr>
+          <p:cNvPr id="3" name="TextBox 2"/>
+          <p:cNvSpPr txBox="1"/>
+          <p:nvPr/>
+        </p:nvSpPr>
+        <p:spPr>
+          <a:xfrm>
+            <a:off x="548640" y="1234440"/>
+            <a:ext cx="11064240" cy="4937760"/>
+          </a:xfrm>
+          <a:prstGeom prst="rect">
+            <a:avLst/>
+          </a:prstGeom>
+          <a:noFill/>
+        </p:spPr>
+        <p:txBody>
+          <a:bodyPr wrap="square">
+            <a:noAutofit/>
+          </a:bodyPr>
+          <a:lstStyle/>
+          <a:p>
+            <a:pPr lvl="0" marL="457200" indent="-228600">
+              <a:buFont typeface="Calibri"/>
+              <a:spcAft>
+                <a:spcPts val="1000"/>
+              </a:spcAft>
+              <a:buSzPct val="100000"/>
+              <a:buChar char="•"/>
+              <a:lnSpc>
+                <a:spcPts val="2200"/>
+              </a:lnSpc>
+            </a:pPr>
+            <a:r>
+              <a:rPr sz="2000" b="0">
+                <a:solidFill>
+                  <a:srgbClr val="333333"/>
+                </a:solidFill>
+                <a:latin typeface="Calibri"/>
+              </a:rPr>
+              <a:t>Complete the quiz for this part</a:t>
+            </a:r>
+          </a:p>
+          <a:p>
+            <a:pPr lvl="0" marL="457200" indent="-228600">
+              <a:buFont typeface="Calibri"/>
+              <a:spcAft>
+                <a:spcPts val="1000"/>
+              </a:spcAft>
+              <a:buSzPct val="100000"/>
+              <a:buChar char="•"/>
+              <a:lnSpc>
+                <a:spcPts val="2200"/>
+              </a:lnSpc>
+            </a:pPr>
+            <a:r>
+              <a:rPr sz="2000" b="0">
+                <a:solidFill>
+                  <a:srgbClr val="333333"/>
+                </a:solidFill>
+                <a:latin typeface="Calibri"/>
+              </a:rPr>
+              <a:t>Continue into the real CLI modules, then Part C algorithms</a:t>
             </a:r>
           </a:p>
         </p:txBody>
